--- a/figs/fig1.pptx
+++ b/figs/fig1.pptx
@@ -105,6 +105,11 @@
       </a:defRPr>
     </a:lvl9pPr>
   </p:defaultTextStyle>
+  <p:extLst>
+    <p:ext uri="{EFAFB233-063F-42B5-8137-9DF3F51BA10A}">
+      <p15:sldGuideLst xmlns:p15="http://schemas.microsoft.com/office/powerpoint/2012/main"/>
+    </p:ext>
+  </p:extLst>
 </p:presentation>
 </file>
 
@@ -255,7 +260,7 @@
           <a:p>
             <a:fld id="{BFBBBFAB-639F-4F44-8AC5-62BA21F76FBF}" type="datetimeFigureOut">
               <a:rPr lang="en-US" smtClean="0"/>
-              <a:t>4/10/2025</a:t>
+              <a:t>4/16/2025</a:t>
             </a:fld>
             <a:endParaRPr lang="en-US"/>
           </a:p>
@@ -453,7 +458,7 @@
           <a:p>
             <a:fld id="{BFBBBFAB-639F-4F44-8AC5-62BA21F76FBF}" type="datetimeFigureOut">
               <a:rPr lang="en-US" smtClean="0"/>
-              <a:t>4/10/2025</a:t>
+              <a:t>4/16/2025</a:t>
             </a:fld>
             <a:endParaRPr lang="en-US"/>
           </a:p>
@@ -661,7 +666,7 @@
           <a:p>
             <a:fld id="{BFBBBFAB-639F-4F44-8AC5-62BA21F76FBF}" type="datetimeFigureOut">
               <a:rPr lang="en-US" smtClean="0"/>
-              <a:t>4/10/2025</a:t>
+              <a:t>4/16/2025</a:t>
             </a:fld>
             <a:endParaRPr lang="en-US"/>
           </a:p>
@@ -859,7 +864,7 @@
           <a:p>
             <a:fld id="{BFBBBFAB-639F-4F44-8AC5-62BA21F76FBF}" type="datetimeFigureOut">
               <a:rPr lang="en-US" smtClean="0"/>
-              <a:t>4/10/2025</a:t>
+              <a:t>4/16/2025</a:t>
             </a:fld>
             <a:endParaRPr lang="en-US"/>
           </a:p>
@@ -1134,7 +1139,7 @@
           <a:p>
             <a:fld id="{BFBBBFAB-639F-4F44-8AC5-62BA21F76FBF}" type="datetimeFigureOut">
               <a:rPr lang="en-US" smtClean="0"/>
-              <a:t>4/10/2025</a:t>
+              <a:t>4/16/2025</a:t>
             </a:fld>
             <a:endParaRPr lang="en-US"/>
           </a:p>
@@ -1399,7 +1404,7 @@
           <a:p>
             <a:fld id="{BFBBBFAB-639F-4F44-8AC5-62BA21F76FBF}" type="datetimeFigureOut">
               <a:rPr lang="en-US" smtClean="0"/>
-              <a:t>4/10/2025</a:t>
+              <a:t>4/16/2025</a:t>
             </a:fld>
             <a:endParaRPr lang="en-US"/>
           </a:p>
@@ -1811,7 +1816,7 @@
           <a:p>
             <a:fld id="{BFBBBFAB-639F-4F44-8AC5-62BA21F76FBF}" type="datetimeFigureOut">
               <a:rPr lang="en-US" smtClean="0"/>
-              <a:t>4/10/2025</a:t>
+              <a:t>4/16/2025</a:t>
             </a:fld>
             <a:endParaRPr lang="en-US"/>
           </a:p>
@@ -1952,7 +1957,7 @@
           <a:p>
             <a:fld id="{BFBBBFAB-639F-4F44-8AC5-62BA21F76FBF}" type="datetimeFigureOut">
               <a:rPr lang="en-US" smtClean="0"/>
-              <a:t>4/10/2025</a:t>
+              <a:t>4/16/2025</a:t>
             </a:fld>
             <a:endParaRPr lang="en-US"/>
           </a:p>
@@ -2065,7 +2070,7 @@
           <a:p>
             <a:fld id="{BFBBBFAB-639F-4F44-8AC5-62BA21F76FBF}" type="datetimeFigureOut">
               <a:rPr lang="en-US" smtClean="0"/>
-              <a:t>4/10/2025</a:t>
+              <a:t>4/16/2025</a:t>
             </a:fld>
             <a:endParaRPr lang="en-US"/>
           </a:p>
@@ -2376,7 +2381,7 @@
           <a:p>
             <a:fld id="{BFBBBFAB-639F-4F44-8AC5-62BA21F76FBF}" type="datetimeFigureOut">
               <a:rPr lang="en-US" smtClean="0"/>
-              <a:t>4/10/2025</a:t>
+              <a:t>4/16/2025</a:t>
             </a:fld>
             <a:endParaRPr lang="en-US"/>
           </a:p>
@@ -2664,7 +2669,7 @@
           <a:p>
             <a:fld id="{BFBBBFAB-639F-4F44-8AC5-62BA21F76FBF}" type="datetimeFigureOut">
               <a:rPr lang="en-US" smtClean="0"/>
-              <a:t>4/10/2025</a:t>
+              <a:t>4/16/2025</a:t>
             </a:fld>
             <a:endParaRPr lang="en-US"/>
           </a:p>
@@ -2905,7 +2910,7 @@
           <a:p>
             <a:fld id="{BFBBBFAB-639F-4F44-8AC5-62BA21F76FBF}" type="datetimeFigureOut">
               <a:rPr lang="en-US" smtClean="0"/>
-              <a:t>4/10/2025</a:t>
+              <a:t>4/16/2025</a:t>
             </a:fld>
             <a:endParaRPr lang="en-US"/>
           </a:p>
@@ -3336,11 +3341,14 @@
         </p:nvGrpSpPr>
         <p:grpSpPr>
           <a:xfrm>
-            <a:off x="1010647" y="4209500"/>
+            <a:off x="984999" y="5897744"/>
             <a:ext cx="12007966" cy="646331"/>
             <a:chOff x="1010647" y="4209500"/>
             <a:chExt cx="12007966" cy="646331"/>
           </a:xfrm>
+          <a:solidFill>
+            <a:srgbClr val="72D056"/>
+          </a:solidFill>
         </p:grpSpPr>
         <p:grpSp>
           <p:nvGrpSpPr>
@@ -3361,9 +3369,7 @@
               <a:chOff x="1840974" y="5051281"/>
               <a:chExt cx="8287910" cy="482769"/>
             </a:xfrm>
-            <a:solidFill>
-              <a:srgbClr val="1F9F88"/>
-            </a:solidFill>
+            <a:grpFill/>
           </p:grpSpPr>
           <p:sp>
             <p:nvSpPr>
@@ -6785,11 +6791,14 @@
         </p:nvGrpSpPr>
         <p:grpSpPr>
           <a:xfrm>
-            <a:off x="1010647" y="3341112"/>
+            <a:off x="1010646" y="3367136"/>
             <a:ext cx="12007966" cy="692498"/>
             <a:chOff x="1010649" y="3632135"/>
             <a:chExt cx="12007966" cy="692498"/>
           </a:xfrm>
+          <a:solidFill>
+            <a:srgbClr val="25848E"/>
+          </a:solidFill>
         </p:grpSpPr>
         <p:grpSp>
           <p:nvGrpSpPr>
@@ -6810,9 +6819,7 @@
               <a:chOff x="1858682" y="4125662"/>
               <a:chExt cx="8287042" cy="482322"/>
             </a:xfrm>
-            <a:solidFill>
-              <a:srgbClr val="25848E"/>
-            </a:solidFill>
+            <a:grpFill/>
           </p:grpSpPr>
           <p:sp>
             <p:nvSpPr>
@@ -9036,11 +9043,14 @@
         </p:nvGrpSpPr>
         <p:grpSpPr>
           <a:xfrm>
-            <a:off x="1010649" y="2579534"/>
+            <a:off x="984999" y="845645"/>
             <a:ext cx="12007966" cy="646331"/>
             <a:chOff x="1010649" y="2782669"/>
             <a:chExt cx="12007966" cy="646331"/>
           </a:xfrm>
+          <a:solidFill>
+            <a:srgbClr val="482979"/>
+          </a:solidFill>
         </p:grpSpPr>
         <p:grpSp>
           <p:nvGrpSpPr>
@@ -9056,14 +9066,12 @@
           </p:nvGrpSpPr>
           <p:grpSpPr>
             <a:xfrm>
-              <a:off x="1850886" y="2900738"/>
-              <a:ext cx="8287766" cy="469178"/>
-              <a:chOff x="1850886" y="2977738"/>
-              <a:chExt cx="8287766" cy="469178"/>
+              <a:off x="1850886" y="2895486"/>
+              <a:ext cx="8287766" cy="474430"/>
+              <a:chOff x="1850886" y="2972486"/>
+              <a:chExt cx="8287766" cy="474430"/>
             </a:xfrm>
-            <a:solidFill>
-              <a:srgbClr val="30698E"/>
-            </a:solidFill>
+            <a:grpFill/>
           </p:grpSpPr>
           <p:sp>
             <p:nvSpPr>
@@ -10743,7 +10751,7 @@
             </p:nvSpPr>
             <p:spPr>
               <a:xfrm>
-                <a:off x="1850886" y="2977738"/>
+                <a:off x="1850886" y="2972486"/>
                 <a:ext cx="256478" cy="234176"/>
               </a:xfrm>
               <a:prstGeom prst="rect">
@@ -10801,9 +10809,7 @@
               <a:prstGeom prst="rect">
                 <a:avLst/>
               </a:prstGeom>
-              <a:solidFill>
-                <a:schemeClr val="bg1"/>
-              </a:solidFill>
+              <a:noFill/>
               <a:ln>
                 <a:noFill/>
               </a:ln>
@@ -10925,11 +10931,14 @@
         </p:nvGrpSpPr>
         <p:grpSpPr>
           <a:xfrm>
-            <a:off x="1010650" y="1715112"/>
+            <a:off x="1010647" y="5077827"/>
             <a:ext cx="12007965" cy="657697"/>
             <a:chOff x="1010650" y="1900853"/>
             <a:chExt cx="12007965" cy="657697"/>
           </a:xfrm>
+          <a:solidFill>
+            <a:srgbClr val="38B977"/>
+          </a:solidFill>
         </p:grpSpPr>
         <p:grpSp>
           <p:nvGrpSpPr>
@@ -10950,9 +10959,7 @@
               <a:chOff x="1859195" y="3194824"/>
               <a:chExt cx="8292802" cy="469178"/>
             </a:xfrm>
-            <a:solidFill>
-              <a:srgbClr val="3E4B89"/>
-            </a:solidFill>
+            <a:grpFill/>
           </p:grpSpPr>
           <p:sp>
             <p:nvSpPr>
@@ -13126,11 +13133,14 @@
         </p:nvGrpSpPr>
         <p:grpSpPr>
           <a:xfrm>
-            <a:off x="1010649" y="876830"/>
+            <a:off x="1010648" y="2593235"/>
             <a:ext cx="12007964" cy="646331"/>
             <a:chOff x="1010651" y="1066800"/>
             <a:chExt cx="12007964" cy="646331"/>
           </a:xfrm>
+          <a:solidFill>
+            <a:srgbClr val="30698E"/>
+          </a:solidFill>
         </p:grpSpPr>
         <p:grpSp>
           <p:nvGrpSpPr>
@@ -13151,9 +13161,7 @@
               <a:chOff x="1845372" y="1522720"/>
               <a:chExt cx="2073874" cy="469178"/>
             </a:xfrm>
-            <a:solidFill>
-              <a:srgbClr val="482979"/>
-            </a:solidFill>
+            <a:grpFill/>
           </p:grpSpPr>
           <p:sp>
             <p:nvSpPr>
@@ -14720,11 +14728,14 @@
         </p:nvGrpSpPr>
         <p:grpSpPr>
           <a:xfrm>
-            <a:off x="1010646" y="5049710"/>
+            <a:off x="984999" y="1638550"/>
             <a:ext cx="12007966" cy="805262"/>
             <a:chOff x="1010647" y="4985222"/>
             <a:chExt cx="12007966" cy="805262"/>
           </a:xfrm>
+          <a:solidFill>
+            <a:srgbClr val="3E4B89"/>
+          </a:solidFill>
         </p:grpSpPr>
         <p:grpSp>
           <p:nvGrpSpPr>
@@ -14745,9 +14756,7 @@
               <a:chOff x="1851610" y="5973793"/>
               <a:chExt cx="10373273" cy="485497"/>
             </a:xfrm>
-            <a:solidFill>
-              <a:srgbClr val="38B977"/>
-            </a:solidFill>
+            <a:grpFill/>
           </p:grpSpPr>
           <p:sp>
             <p:nvSpPr>
@@ -16951,9 +16960,7 @@
               <a:prstGeom prst="rect">
                 <a:avLst/>
               </a:prstGeom>
-              <a:solidFill>
-                <a:schemeClr val="bg1"/>
-              </a:solidFill>
+              <a:grpFill/>
               <a:ln>
                 <a:noFill/>
               </a:ln>
@@ -17006,6 +17013,7 @@
             <a:prstGeom prst="straightConnector1">
               <a:avLst/>
             </a:prstGeom>
+            <a:grpFill/>
             <a:ln>
               <a:tailEnd type="triangle"/>
             </a:ln>
@@ -17116,11 +17124,14 @@
         </p:nvGrpSpPr>
         <p:grpSpPr>
           <a:xfrm>
-            <a:off x="984999" y="5808805"/>
+            <a:off x="1010646" y="4187054"/>
             <a:ext cx="12053688" cy="764983"/>
             <a:chOff x="984999" y="5808805"/>
             <a:chExt cx="12053688" cy="764983"/>
           </a:xfrm>
+          <a:solidFill>
+            <a:srgbClr val="1F9F88"/>
+          </a:solidFill>
         </p:grpSpPr>
         <p:grpSp>
           <p:nvGrpSpPr>
@@ -17141,9 +17152,7 @@
               <a:chOff x="1818727" y="398710"/>
               <a:chExt cx="10373273" cy="460034"/>
             </a:xfrm>
-            <a:solidFill>
-              <a:srgbClr val="72D056"/>
-            </a:solidFill>
+            <a:grpFill/>
           </p:grpSpPr>
           <p:sp>
             <p:nvSpPr>
@@ -19714,6 +19723,7 @@
             <a:prstGeom prst="straightConnector1">
               <a:avLst/>
             </a:prstGeom>
+            <a:grpFill/>
             <a:ln>
               <a:tailEnd type="triangle"/>
             </a:ln>
@@ -19810,6 +19820,110 @@
           </p:txBody>
         </p:sp>
       </p:grpSp>
+      <p:sp>
+        <p:nvSpPr>
+          <p:cNvPr id="2" name="Rectangle 1">
+            <a:extLst>
+              <a:ext uri="{FF2B5EF4-FFF2-40B4-BE49-F238E27FC236}">
+                <a16:creationId xmlns:a16="http://schemas.microsoft.com/office/drawing/2014/main" id="{BAA9AC4F-82DE-8E07-5587-EEF7F152635D}"/>
+              </a:ext>
+            </a:extLst>
+          </p:cNvPr>
+          <p:cNvSpPr/>
+          <p:nvPr/>
+        </p:nvSpPr>
+        <p:spPr>
+          <a:xfrm>
+            <a:off x="1956510" y="964951"/>
+            <a:ext cx="116611" cy="213093"/>
+          </a:xfrm>
+          <a:prstGeom prst="rect">
+            <a:avLst/>
+          </a:prstGeom>
+          <a:solidFill>
+            <a:schemeClr val="bg1"/>
+          </a:solidFill>
+          <a:ln>
+            <a:noFill/>
+          </a:ln>
+        </p:spPr>
+        <p:style>
+          <a:lnRef idx="2">
+            <a:schemeClr val="accent1">
+              <a:shade val="15000"/>
+            </a:schemeClr>
+          </a:lnRef>
+          <a:fillRef idx="1">
+            <a:schemeClr val="accent1"/>
+          </a:fillRef>
+          <a:effectRef idx="0">
+            <a:schemeClr val="accent1"/>
+          </a:effectRef>
+          <a:fontRef idx="minor">
+            <a:schemeClr val="lt1"/>
+          </a:fontRef>
+        </p:style>
+        <p:txBody>
+          <a:bodyPr rtlCol="0" anchor="ctr"/>
+          <a:lstStyle/>
+          <a:p>
+            <a:pPr algn="ctr"/>
+            <a:endParaRPr lang="en-US" dirty="0"/>
+          </a:p>
+        </p:txBody>
+      </p:sp>
+      <p:sp>
+        <p:nvSpPr>
+          <p:cNvPr id="3" name="Rectangle 2">
+            <a:extLst>
+              <a:ext uri="{FF2B5EF4-FFF2-40B4-BE49-F238E27FC236}">
+                <a16:creationId xmlns:a16="http://schemas.microsoft.com/office/drawing/2014/main" id="{0C582159-8669-A36B-CFCD-5AB737CDD543}"/>
+              </a:ext>
+            </a:extLst>
+          </p:cNvPr>
+          <p:cNvSpPr/>
+          <p:nvPr/>
+        </p:nvSpPr>
+        <p:spPr>
+          <a:xfrm>
+            <a:off x="1952276" y="1754583"/>
+            <a:ext cx="116611" cy="213093"/>
+          </a:xfrm>
+          <a:prstGeom prst="rect">
+            <a:avLst/>
+          </a:prstGeom>
+          <a:solidFill>
+            <a:schemeClr val="bg1"/>
+          </a:solidFill>
+          <a:ln>
+            <a:noFill/>
+          </a:ln>
+        </p:spPr>
+        <p:style>
+          <a:lnRef idx="2">
+            <a:schemeClr val="accent1">
+              <a:shade val="15000"/>
+            </a:schemeClr>
+          </a:lnRef>
+          <a:fillRef idx="1">
+            <a:schemeClr val="accent1"/>
+          </a:fillRef>
+          <a:effectRef idx="0">
+            <a:schemeClr val="accent1"/>
+          </a:effectRef>
+          <a:fontRef idx="minor">
+            <a:schemeClr val="lt1"/>
+          </a:fontRef>
+        </p:style>
+        <p:txBody>
+          <a:bodyPr rtlCol="0" anchor="ctr"/>
+          <a:lstStyle/>
+          <a:p>
+            <a:pPr algn="ctr"/>
+            <a:endParaRPr lang="en-US" dirty="0"/>
+          </a:p>
+        </p:txBody>
+      </p:sp>
     </p:spTree>
     <p:extLst>
       <p:ext uri="{BB962C8B-B14F-4D97-AF65-F5344CB8AC3E}">

--- a/figs/fig1.pptx
+++ b/figs/fig1.pptx
@@ -260,7 +260,7 @@
           <a:p>
             <a:fld id="{BFBBBFAB-639F-4F44-8AC5-62BA21F76FBF}" type="datetimeFigureOut">
               <a:rPr lang="en-US" smtClean="0"/>
-              <a:t>4/16/2025</a:t>
+              <a:t>8/8/2025</a:t>
             </a:fld>
             <a:endParaRPr lang="en-US"/>
           </a:p>
@@ -458,7 +458,7 @@
           <a:p>
             <a:fld id="{BFBBBFAB-639F-4F44-8AC5-62BA21F76FBF}" type="datetimeFigureOut">
               <a:rPr lang="en-US" smtClean="0"/>
-              <a:t>4/16/2025</a:t>
+              <a:t>8/8/2025</a:t>
             </a:fld>
             <a:endParaRPr lang="en-US"/>
           </a:p>
@@ -666,7 +666,7 @@
           <a:p>
             <a:fld id="{BFBBBFAB-639F-4F44-8AC5-62BA21F76FBF}" type="datetimeFigureOut">
               <a:rPr lang="en-US" smtClean="0"/>
-              <a:t>4/16/2025</a:t>
+              <a:t>8/8/2025</a:t>
             </a:fld>
             <a:endParaRPr lang="en-US"/>
           </a:p>
@@ -864,7 +864,7 @@
           <a:p>
             <a:fld id="{BFBBBFAB-639F-4F44-8AC5-62BA21F76FBF}" type="datetimeFigureOut">
               <a:rPr lang="en-US" smtClean="0"/>
-              <a:t>4/16/2025</a:t>
+              <a:t>8/8/2025</a:t>
             </a:fld>
             <a:endParaRPr lang="en-US"/>
           </a:p>
@@ -1139,7 +1139,7 @@
           <a:p>
             <a:fld id="{BFBBBFAB-639F-4F44-8AC5-62BA21F76FBF}" type="datetimeFigureOut">
               <a:rPr lang="en-US" smtClean="0"/>
-              <a:t>4/16/2025</a:t>
+              <a:t>8/8/2025</a:t>
             </a:fld>
             <a:endParaRPr lang="en-US"/>
           </a:p>
@@ -1404,7 +1404,7 @@
           <a:p>
             <a:fld id="{BFBBBFAB-639F-4F44-8AC5-62BA21F76FBF}" type="datetimeFigureOut">
               <a:rPr lang="en-US" smtClean="0"/>
-              <a:t>4/16/2025</a:t>
+              <a:t>8/8/2025</a:t>
             </a:fld>
             <a:endParaRPr lang="en-US"/>
           </a:p>
@@ -1816,7 +1816,7 @@
           <a:p>
             <a:fld id="{BFBBBFAB-639F-4F44-8AC5-62BA21F76FBF}" type="datetimeFigureOut">
               <a:rPr lang="en-US" smtClean="0"/>
-              <a:t>4/16/2025</a:t>
+              <a:t>8/8/2025</a:t>
             </a:fld>
             <a:endParaRPr lang="en-US"/>
           </a:p>
@@ -1957,7 +1957,7 @@
           <a:p>
             <a:fld id="{BFBBBFAB-639F-4F44-8AC5-62BA21F76FBF}" type="datetimeFigureOut">
               <a:rPr lang="en-US" smtClean="0"/>
-              <a:t>4/16/2025</a:t>
+              <a:t>8/8/2025</a:t>
             </a:fld>
             <a:endParaRPr lang="en-US"/>
           </a:p>
@@ -2070,7 +2070,7 @@
           <a:p>
             <a:fld id="{BFBBBFAB-639F-4F44-8AC5-62BA21F76FBF}" type="datetimeFigureOut">
               <a:rPr lang="en-US" smtClean="0"/>
-              <a:t>4/16/2025</a:t>
+              <a:t>8/8/2025</a:t>
             </a:fld>
             <a:endParaRPr lang="en-US"/>
           </a:p>
@@ -2381,7 +2381,7 @@
           <a:p>
             <a:fld id="{BFBBBFAB-639F-4F44-8AC5-62BA21F76FBF}" type="datetimeFigureOut">
               <a:rPr lang="en-US" smtClean="0"/>
-              <a:t>4/16/2025</a:t>
+              <a:t>8/8/2025</a:t>
             </a:fld>
             <a:endParaRPr lang="en-US"/>
           </a:p>
@@ -2669,7 +2669,7 @@
           <a:p>
             <a:fld id="{BFBBBFAB-639F-4F44-8AC5-62BA21F76FBF}" type="datetimeFigureOut">
               <a:rPr lang="en-US" smtClean="0"/>
-              <a:t>4/16/2025</a:t>
+              <a:t>8/8/2025</a:t>
             </a:fld>
             <a:endParaRPr lang="en-US"/>
           </a:p>
@@ -2910,7 +2910,7 @@
           <a:p>
             <a:fld id="{BFBBBFAB-639F-4F44-8AC5-62BA21F76FBF}" type="datetimeFigureOut">
               <a:rPr lang="en-US" smtClean="0"/>
-              <a:t>4/16/2025</a:t>
+              <a:t>8/8/2025</a:t>
             </a:fld>
             <a:endParaRPr lang="en-US"/>
           </a:p>
@@ -19924,6 +19924,116 @@
           </a:p>
         </p:txBody>
       </p:sp>
+      <p:sp>
+        <p:nvSpPr>
+          <p:cNvPr id="448" name="TextBox 447">
+            <a:extLst>
+              <a:ext uri="{FF2B5EF4-FFF2-40B4-BE49-F238E27FC236}">
+                <a16:creationId xmlns:a16="http://schemas.microsoft.com/office/drawing/2014/main" id="{3630D779-C6F3-481F-AF37-EA20F1CA5B8E}"/>
+              </a:ext>
+            </a:extLst>
+          </p:cNvPr>
+          <p:cNvSpPr txBox="1"/>
+          <p:nvPr/>
+        </p:nvSpPr>
+        <p:spPr>
+          <a:xfrm rot="16200000">
+            <a:off x="-1906262" y="3411811"/>
+            <a:ext cx="5125757" cy="584775"/>
+          </a:xfrm>
+          <a:prstGeom prst="rect">
+            <a:avLst/>
+          </a:prstGeom>
+          <a:noFill/>
+        </p:spPr>
+        <p:txBody>
+          <a:bodyPr wrap="square" rtlCol="0">
+            <a:spAutoFit/>
+          </a:bodyPr>
+          <a:lstStyle/>
+          <a:p>
+            <a:pPr algn="ctr"/>
+            <a:r>
+              <a:rPr lang="en-US" sz="3200" dirty="0">
+                <a:latin typeface="+mj-lt"/>
+              </a:rPr>
+              <a:t>Movement Combinations</a:t>
+            </a:r>
+          </a:p>
+        </p:txBody>
+      </p:sp>
+      <p:sp>
+        <p:nvSpPr>
+          <p:cNvPr id="449" name="TextBox 448">
+            <a:extLst>
+              <a:ext uri="{FF2B5EF4-FFF2-40B4-BE49-F238E27FC236}">
+                <a16:creationId xmlns:a16="http://schemas.microsoft.com/office/drawing/2014/main" id="{FB54235D-B52C-4913-211B-3176A7974450}"/>
+              </a:ext>
+            </a:extLst>
+          </p:cNvPr>
+          <p:cNvSpPr txBox="1"/>
+          <p:nvPr/>
+        </p:nvSpPr>
+        <p:spPr>
+          <a:xfrm>
+            <a:off x="10089357" y="2259146"/>
+            <a:ext cx="197501" cy="369332"/>
+          </a:xfrm>
+          <a:prstGeom prst="rect">
+            <a:avLst/>
+          </a:prstGeom>
+          <a:noFill/>
+        </p:spPr>
+        <p:txBody>
+          <a:bodyPr wrap="square" rtlCol="0">
+            <a:spAutoFit/>
+          </a:bodyPr>
+          <a:lstStyle/>
+          <a:p>
+            <a:r>
+              <a:rPr lang="en-US"/>
+              <a:t>*</a:t>
+            </a:r>
+            <a:endParaRPr lang="en-US" dirty="0"/>
+          </a:p>
+        </p:txBody>
+      </p:sp>
+      <p:sp>
+        <p:nvSpPr>
+          <p:cNvPr id="450" name="TextBox 449">
+            <a:extLst>
+              <a:ext uri="{FF2B5EF4-FFF2-40B4-BE49-F238E27FC236}">
+                <a16:creationId xmlns:a16="http://schemas.microsoft.com/office/drawing/2014/main" id="{6BD86A88-84FA-C5DA-3D55-CC0BF26373D5}"/>
+              </a:ext>
+            </a:extLst>
+          </p:cNvPr>
+          <p:cNvSpPr txBox="1"/>
+          <p:nvPr/>
+        </p:nvSpPr>
+        <p:spPr>
+          <a:xfrm>
+            <a:off x="10167600" y="4767371"/>
+            <a:ext cx="197501" cy="369332"/>
+          </a:xfrm>
+          <a:prstGeom prst="rect">
+            <a:avLst/>
+          </a:prstGeom>
+          <a:noFill/>
+        </p:spPr>
+        <p:txBody>
+          <a:bodyPr wrap="square" rtlCol="0">
+            <a:spAutoFit/>
+          </a:bodyPr>
+          <a:lstStyle/>
+          <a:p>
+            <a:r>
+              <a:rPr lang="en-US"/>
+              <a:t>*</a:t>
+            </a:r>
+            <a:endParaRPr lang="en-US" dirty="0"/>
+          </a:p>
+        </p:txBody>
+      </p:sp>
     </p:spTree>
     <p:extLst>
       <p:ext uri="{BB962C8B-B14F-4D97-AF65-F5344CB8AC3E}">
@@ -23940,8 +24050,1032 @@
           <a:p>
             <a:r>
               <a:rPr lang="en-US" sz="1600" dirty="0"/>
-              <a:t>To 192 Grid Cells</a:t>
+              <a:t>*To 192 Grid Cells</a:t>
             </a:r>
+          </a:p>
+        </p:txBody>
+      </p:sp>
+      <p:grpSp>
+        <p:nvGrpSpPr>
+          <p:cNvPr id="512" name="Group 511">
+            <a:extLst>
+              <a:ext uri="{FF2B5EF4-FFF2-40B4-BE49-F238E27FC236}">
+                <a16:creationId xmlns:a16="http://schemas.microsoft.com/office/drawing/2014/main" id="{76CF468B-8AEF-517A-6DBD-1DF3F29C1B6E}"/>
+              </a:ext>
+            </a:extLst>
+          </p:cNvPr>
+          <p:cNvGrpSpPr/>
+          <p:nvPr/>
+        </p:nvGrpSpPr>
+        <p:grpSpPr>
+          <a:xfrm rot="5400000">
+            <a:off x="8208604" y="3055251"/>
+            <a:ext cx="5764744" cy="3988390"/>
+            <a:chOff x="5756542" y="1656764"/>
+            <a:chExt cx="5764744" cy="3988390"/>
+          </a:xfrm>
+          <a:solidFill>
+            <a:schemeClr val="tx2">
+              <a:lumMod val="50000"/>
+              <a:lumOff val="50000"/>
+            </a:schemeClr>
+          </a:solidFill>
+        </p:grpSpPr>
+        <p:sp>
+          <p:nvSpPr>
+            <p:cNvPr id="514" name="Rectangle 513">
+              <a:extLst>
+                <a:ext uri="{FF2B5EF4-FFF2-40B4-BE49-F238E27FC236}">
+                  <a16:creationId xmlns:a16="http://schemas.microsoft.com/office/drawing/2014/main" id="{146BCEEC-9982-EA87-64A6-765995D2DAAB}"/>
+                </a:ext>
+              </a:extLst>
+            </p:cNvPr>
+            <p:cNvSpPr/>
+            <p:nvPr/>
+          </p:nvSpPr>
+          <p:spPr>
+            <a:xfrm rot="16200000">
+              <a:off x="5681930" y="3535366"/>
+              <a:ext cx="2184400" cy="2035175"/>
+            </a:xfrm>
+            <a:prstGeom prst="rect">
+              <a:avLst/>
+            </a:prstGeom>
+            <a:grpFill/>
+          </p:spPr>
+          <p:style>
+            <a:lnRef idx="2">
+              <a:schemeClr val="accent1">
+                <a:shade val="15000"/>
+              </a:schemeClr>
+            </a:lnRef>
+            <a:fillRef idx="1">
+              <a:schemeClr val="accent1"/>
+            </a:fillRef>
+            <a:effectRef idx="0">
+              <a:schemeClr val="accent1"/>
+            </a:effectRef>
+            <a:fontRef idx="minor">
+              <a:schemeClr val="lt1"/>
+            </a:fontRef>
+          </p:style>
+          <p:txBody>
+            <a:bodyPr rtlCol="0" anchor="ctr"/>
+            <a:lstStyle/>
+            <a:p>
+              <a:pPr algn="ctr"/>
+              <a:r>
+                <a:rPr lang="en-US" sz="2400" b="1" dirty="0"/>
+                <a:t>MPA </a:t>
+              </a:r>
+              <a:r>
+                <a:rPr lang="en-US" sz="2400" b="1" i="1" dirty="0"/>
+                <a:t>A</a:t>
+              </a:r>
+            </a:p>
+          </p:txBody>
+        </p:sp>
+        <p:sp>
+          <p:nvSpPr>
+            <p:cNvPr id="516" name="Arrow: Curved Up 515">
+              <a:extLst>
+                <a:ext uri="{FF2B5EF4-FFF2-40B4-BE49-F238E27FC236}">
+                  <a16:creationId xmlns:a16="http://schemas.microsoft.com/office/drawing/2014/main" id="{537402A5-9DF4-7C1E-288D-E8C82B8AFC8A}"/>
+                </a:ext>
+              </a:extLst>
+            </p:cNvPr>
+            <p:cNvSpPr/>
+            <p:nvPr/>
+          </p:nvSpPr>
+          <p:spPr>
+            <a:xfrm rot="16200000" flipH="1">
+              <a:off x="9567868" y="2860882"/>
+              <a:ext cx="3157535" cy="749300"/>
+            </a:xfrm>
+            <a:prstGeom prst="curvedUpArrow">
+              <a:avLst>
+                <a:gd name="adj1" fmla="val 21133"/>
+                <a:gd name="adj2" fmla="val 50000"/>
+                <a:gd name="adj3" fmla="val 25000"/>
+              </a:avLst>
+            </a:prstGeom>
+            <a:solidFill>
+              <a:schemeClr val="tx1"/>
+            </a:solidFill>
+          </p:spPr>
+          <p:style>
+            <a:lnRef idx="2">
+              <a:schemeClr val="dk1">
+                <a:shade val="15000"/>
+              </a:schemeClr>
+            </a:lnRef>
+            <a:fillRef idx="1">
+              <a:schemeClr val="dk1"/>
+            </a:fillRef>
+            <a:effectRef idx="0">
+              <a:schemeClr val="dk1"/>
+            </a:effectRef>
+            <a:fontRef idx="minor">
+              <a:schemeClr val="lt1"/>
+            </a:fontRef>
+          </p:style>
+          <p:txBody>
+            <a:bodyPr rtlCol="0" anchor="ctr"/>
+            <a:lstStyle/>
+            <a:p>
+              <a:pPr algn="ctr"/>
+              <a:endParaRPr lang="en-US">
+                <a:solidFill>
+                  <a:schemeClr val="tx1"/>
+                </a:solidFill>
+              </a:endParaRPr>
+            </a:p>
+          </p:txBody>
+        </p:sp>
+      </p:grpSp>
+      <p:sp>
+        <p:nvSpPr>
+          <p:cNvPr id="517" name="Rectangle 516">
+            <a:extLst>
+              <a:ext uri="{FF2B5EF4-FFF2-40B4-BE49-F238E27FC236}">
+                <a16:creationId xmlns:a16="http://schemas.microsoft.com/office/drawing/2014/main" id="{578C8C2A-B1D9-B275-A2AC-5B743CAF8E03}"/>
+              </a:ext>
+            </a:extLst>
+          </p:cNvPr>
+          <p:cNvSpPr/>
+          <p:nvPr/>
+        </p:nvSpPr>
+        <p:spPr>
+          <a:xfrm>
+            <a:off x="9114155" y="4543207"/>
+            <a:ext cx="2184400" cy="2035175"/>
+          </a:xfrm>
+          <a:prstGeom prst="rect">
+            <a:avLst/>
+          </a:prstGeom>
+          <a:solidFill>
+            <a:schemeClr val="tx2">
+              <a:lumMod val="50000"/>
+              <a:lumOff val="50000"/>
+            </a:schemeClr>
+          </a:solidFill>
+        </p:spPr>
+        <p:style>
+          <a:lnRef idx="2">
+            <a:schemeClr val="accent1">
+              <a:shade val="15000"/>
+            </a:schemeClr>
+          </a:lnRef>
+          <a:fillRef idx="1">
+            <a:schemeClr val="accent1"/>
+          </a:fillRef>
+          <a:effectRef idx="0">
+            <a:schemeClr val="accent1"/>
+          </a:effectRef>
+          <a:fontRef idx="minor">
+            <a:schemeClr val="lt1"/>
+          </a:fontRef>
+        </p:style>
+        <p:txBody>
+          <a:bodyPr rtlCol="0" anchor="ctr"/>
+          <a:lstStyle/>
+          <a:p>
+            <a:pPr algn="ctr"/>
+            <a:r>
+              <a:rPr lang="en-US" sz="2400" dirty="0"/>
+              <a:t>Fished Area</a:t>
+            </a:r>
+          </a:p>
+        </p:txBody>
+      </p:sp>
+      <p:sp>
+        <p:nvSpPr>
+          <p:cNvPr id="521" name="TextBox 520">
+            <a:extLst>
+              <a:ext uri="{FF2B5EF4-FFF2-40B4-BE49-F238E27FC236}">
+                <a16:creationId xmlns:a16="http://schemas.microsoft.com/office/drawing/2014/main" id="{8D78E305-6092-34CB-8187-427FE0DA03A3}"/>
+              </a:ext>
+            </a:extLst>
+          </p:cNvPr>
+          <p:cNvSpPr txBox="1"/>
+          <p:nvPr/>
+        </p:nvSpPr>
+        <p:spPr>
+          <a:xfrm rot="16200000">
+            <a:off x="-1906262" y="3411811"/>
+            <a:ext cx="5125757" cy="584775"/>
+          </a:xfrm>
+          <a:prstGeom prst="rect">
+            <a:avLst/>
+          </a:prstGeom>
+          <a:noFill/>
+        </p:spPr>
+        <p:txBody>
+          <a:bodyPr wrap="square" rtlCol="0">
+            <a:spAutoFit/>
+          </a:bodyPr>
+          <a:lstStyle/>
+          <a:p>
+            <a:pPr algn="ctr"/>
+            <a:r>
+              <a:rPr lang="en-US" sz="3200" dirty="0">
+                <a:latin typeface="+mj-lt"/>
+              </a:rPr>
+              <a:t>Connectivity Metrics</a:t>
+            </a:r>
+          </a:p>
+        </p:txBody>
+      </p:sp>
+      <p:sp>
+        <p:nvSpPr>
+          <p:cNvPr id="522" name="TextBox 521">
+            <a:extLst>
+              <a:ext uri="{FF2B5EF4-FFF2-40B4-BE49-F238E27FC236}">
+                <a16:creationId xmlns:a16="http://schemas.microsoft.com/office/drawing/2014/main" id="{2E236DF8-4576-B39A-5911-C404A2256760}"/>
+              </a:ext>
+            </a:extLst>
+          </p:cNvPr>
+          <p:cNvSpPr txBox="1"/>
+          <p:nvPr/>
+        </p:nvSpPr>
+        <p:spPr>
+          <a:xfrm>
+            <a:off x="-373918" y="1141319"/>
+            <a:ext cx="5125757" cy="461665"/>
+          </a:xfrm>
+          <a:prstGeom prst="rect">
+            <a:avLst/>
+          </a:prstGeom>
+          <a:noFill/>
+        </p:spPr>
+        <p:txBody>
+          <a:bodyPr wrap="square" rtlCol="0">
+            <a:spAutoFit/>
+          </a:bodyPr>
+          <a:lstStyle/>
+          <a:p>
+            <a:pPr algn="ctr"/>
+            <a:r>
+              <a:rPr lang="en-US" sz="2400" dirty="0"/>
+              <a:t>Retention</a:t>
+            </a:r>
+          </a:p>
+        </p:txBody>
+      </p:sp>
+      <p:sp>
+        <p:nvSpPr>
+          <p:cNvPr id="523" name="TextBox 522">
+            <a:extLst>
+              <a:ext uri="{FF2B5EF4-FFF2-40B4-BE49-F238E27FC236}">
+                <a16:creationId xmlns:a16="http://schemas.microsoft.com/office/drawing/2014/main" id="{F1F31E29-914E-2C9B-953D-0C95CA4BA35A}"/>
+              </a:ext>
+            </a:extLst>
+          </p:cNvPr>
+          <p:cNvSpPr txBox="1"/>
+          <p:nvPr/>
+        </p:nvSpPr>
+        <p:spPr>
+          <a:xfrm>
+            <a:off x="3634779" y="1134851"/>
+            <a:ext cx="5125757" cy="461665"/>
+          </a:xfrm>
+          <a:prstGeom prst="rect">
+            <a:avLst/>
+          </a:prstGeom>
+          <a:noFill/>
+        </p:spPr>
+        <p:txBody>
+          <a:bodyPr wrap="square" rtlCol="0">
+            <a:spAutoFit/>
+          </a:bodyPr>
+          <a:lstStyle/>
+          <a:p>
+            <a:pPr algn="ctr"/>
+            <a:r>
+              <a:rPr lang="en-US" sz="2400" dirty="0"/>
+              <a:t>Import</a:t>
+            </a:r>
+          </a:p>
+        </p:txBody>
+      </p:sp>
+      <p:sp>
+        <p:nvSpPr>
+          <p:cNvPr id="524" name="Arrow: Curved Up 523">
+            <a:extLst>
+              <a:ext uri="{FF2B5EF4-FFF2-40B4-BE49-F238E27FC236}">
+                <a16:creationId xmlns:a16="http://schemas.microsoft.com/office/drawing/2014/main" id="{95584D47-7A0F-DA05-C1AF-A4F66896520B}"/>
+              </a:ext>
+            </a:extLst>
+          </p:cNvPr>
+          <p:cNvSpPr/>
+          <p:nvPr/>
+        </p:nvSpPr>
+        <p:spPr>
+          <a:xfrm rot="16200000" flipH="1">
+            <a:off x="10795454" y="3922269"/>
+            <a:ext cx="1676448" cy="689910"/>
+          </a:xfrm>
+          <a:prstGeom prst="curvedUpArrow">
+            <a:avLst>
+              <a:gd name="adj1" fmla="val 18326"/>
+              <a:gd name="adj2" fmla="val 50000"/>
+              <a:gd name="adj3" fmla="val 25000"/>
+            </a:avLst>
+          </a:prstGeom>
+          <a:solidFill>
+            <a:schemeClr val="tx1"/>
+          </a:solidFill>
+        </p:spPr>
+        <p:style>
+          <a:lnRef idx="2">
+            <a:schemeClr val="dk1">
+              <a:shade val="15000"/>
+            </a:schemeClr>
+          </a:lnRef>
+          <a:fillRef idx="1">
+            <a:schemeClr val="dk1"/>
+          </a:fillRef>
+          <a:effectRef idx="0">
+            <a:schemeClr val="dk1"/>
+          </a:effectRef>
+          <a:fontRef idx="minor">
+            <a:schemeClr val="lt1"/>
+          </a:fontRef>
+        </p:style>
+        <p:txBody>
+          <a:bodyPr rtlCol="0" anchor="ctr"/>
+          <a:lstStyle/>
+          <a:p>
+            <a:pPr algn="ctr"/>
+            <a:endParaRPr lang="en-US" dirty="0">
+              <a:solidFill>
+                <a:schemeClr val="tx1"/>
+              </a:solidFill>
+            </a:endParaRPr>
+          </a:p>
+        </p:txBody>
+      </p:sp>
+      <p:sp>
+        <p:nvSpPr>
+          <p:cNvPr id="525" name="TextBox 524">
+            <a:extLst>
+              <a:ext uri="{FF2B5EF4-FFF2-40B4-BE49-F238E27FC236}">
+                <a16:creationId xmlns:a16="http://schemas.microsoft.com/office/drawing/2014/main" id="{21BD8A03-52FE-AF2B-F2B0-D7172AA48155}"/>
+              </a:ext>
+            </a:extLst>
+          </p:cNvPr>
+          <p:cNvSpPr txBox="1"/>
+          <p:nvPr/>
+        </p:nvSpPr>
+        <p:spPr>
+          <a:xfrm>
+            <a:off x="7643476" y="1137267"/>
+            <a:ext cx="5125757" cy="461665"/>
+          </a:xfrm>
+          <a:prstGeom prst="rect">
+            <a:avLst/>
+          </a:prstGeom>
+          <a:noFill/>
+        </p:spPr>
+        <p:txBody>
+          <a:bodyPr wrap="square" rtlCol="0">
+            <a:spAutoFit/>
+          </a:bodyPr>
+          <a:lstStyle/>
+          <a:p>
+            <a:pPr algn="ctr"/>
+            <a:r>
+              <a:rPr lang="en-US" sz="2400" dirty="0"/>
+              <a:t>Export</a:t>
+            </a:r>
+          </a:p>
+        </p:txBody>
+      </p:sp>
+      <mc:AlternateContent xmlns:mc="http://schemas.openxmlformats.org/markup-compatibility/2006" xmlns:a14="http://schemas.microsoft.com/office/drawing/2010/main">
+        <mc:Choice Requires="a14">
+          <p:sp>
+            <p:nvSpPr>
+              <p:cNvPr id="526" name="TextBox 525">
+                <a:extLst>
+                  <a:ext uri="{FF2B5EF4-FFF2-40B4-BE49-F238E27FC236}">
+                    <a16:creationId xmlns:a16="http://schemas.microsoft.com/office/drawing/2014/main" id="{91E7457C-DAA3-D530-53F8-D39B37034CE5}"/>
+                  </a:ext>
+                </a:extLst>
+              </p:cNvPr>
+              <p:cNvSpPr txBox="1"/>
+              <p:nvPr/>
+            </p:nvSpPr>
+            <p:spPr>
+              <a:xfrm>
+                <a:off x="628503" y="5362513"/>
+                <a:ext cx="8132033" cy="708335"/>
+              </a:xfrm>
+              <a:prstGeom prst="rect">
+                <a:avLst/>
+              </a:prstGeom>
+              <a:noFill/>
+            </p:spPr>
+            <p:txBody>
+              <a:bodyPr wrap="square" lIns="0" tIns="0" rIns="0" bIns="0" rtlCol="0">
+                <a:spAutoFit/>
+              </a:bodyPr>
+              <a:lstStyle/>
+              <a:p>
+                <a:pPr/>
+                <a14:m>
+                  <m:oMathPara xmlns:m="http://schemas.openxmlformats.org/officeDocument/2006/math">
+                    <m:oMathParaPr>
+                      <m:jc m:val="center"/>
+                    </m:oMathParaPr>
+                    <m:oMath xmlns:m="http://schemas.openxmlformats.org/officeDocument/2006/math">
+                      <m:r>
+                        <m:rPr>
+                          <m:sty m:val="p"/>
+                        </m:rPr>
+                        <a:rPr lang="en-US" sz="2400" b="0" i="0" smtClean="0">
+                          <a:latin typeface="Cambria Math" panose="02040503050406030204" pitchFamily="18" charset="0"/>
+                        </a:rPr>
+                        <m:t>Adult</m:t>
+                      </m:r>
+                      <m:r>
+                        <a:rPr lang="en-US" sz="2400" b="0" i="0" smtClean="0">
+                          <a:latin typeface="Cambria Math" panose="02040503050406030204" pitchFamily="18" charset="0"/>
+                        </a:rPr>
+                        <m:t> </m:t>
+                      </m:r>
+                      <m:r>
+                        <m:rPr>
+                          <m:sty m:val="p"/>
+                        </m:rPr>
+                        <a:rPr lang="en-US" sz="2400" b="0" i="0" smtClean="0">
+                          <a:latin typeface="Cambria Math" panose="02040503050406030204" pitchFamily="18" charset="0"/>
+                        </a:rPr>
+                        <m:t>Porportion</m:t>
+                      </m:r>
+                      <m:r>
+                        <a:rPr lang="en-US" sz="2400" b="0" i="0" smtClean="0">
+                          <a:latin typeface="Cambria Math" panose="02040503050406030204" pitchFamily="18" charset="0"/>
+                        </a:rPr>
+                        <m:t> </m:t>
+                      </m:r>
+                      <m:r>
+                        <m:rPr>
+                          <m:sty m:val="p"/>
+                        </m:rPr>
+                        <a:rPr lang="en-US" sz="2400" b="0" i="0" smtClean="0">
+                          <a:latin typeface="Cambria Math" panose="02040503050406030204" pitchFamily="18" charset="0"/>
+                        </a:rPr>
+                        <m:t>of</m:t>
+                      </m:r>
+                      <m:r>
+                        <a:rPr lang="en-US" sz="2400" b="0" i="0" smtClean="0">
+                          <a:latin typeface="Cambria Math" panose="02040503050406030204" pitchFamily="18" charset="0"/>
+                        </a:rPr>
+                        <m:t> </m:t>
+                      </m:r>
+                      <m:r>
+                        <m:rPr>
+                          <m:sty m:val="p"/>
+                        </m:rPr>
+                        <a:rPr lang="en-US" sz="2400" b="0" i="0" smtClean="0">
+                          <a:latin typeface="Cambria Math" panose="02040503050406030204" pitchFamily="18" charset="0"/>
+                        </a:rPr>
+                        <m:t>Metric</m:t>
+                      </m:r>
+                      <m:r>
+                        <a:rPr lang="en-US" sz="2400" b="0" i="0" smtClean="0">
+                          <a:latin typeface="Cambria Math" panose="02040503050406030204" pitchFamily="18" charset="0"/>
+                        </a:rPr>
+                        <m:t>=</m:t>
+                      </m:r>
+                      <m:f>
+                        <m:fPr>
+                          <m:ctrlPr>
+                            <a:rPr lang="en-US" sz="2400" b="0" i="1" smtClean="0">
+                              <a:latin typeface="Cambria Math" panose="02040503050406030204" pitchFamily="18" charset="0"/>
+                            </a:rPr>
+                          </m:ctrlPr>
+                        </m:fPr>
+                        <m:num>
+                          <m:r>
+                            <a:rPr lang="en-US" sz="2400" b="0" i="0" smtClean="0">
+                              <a:latin typeface="Cambria Math" panose="02040503050406030204" pitchFamily="18" charset="0"/>
+                            </a:rPr>
+                            <m:t># </m:t>
+                          </m:r>
+                          <m:r>
+                            <m:rPr>
+                              <m:sty m:val="p"/>
+                            </m:rPr>
+                            <a:rPr lang="en-US" sz="2400" b="0" i="0" smtClean="0">
+                              <a:latin typeface="Cambria Math" panose="02040503050406030204" pitchFamily="18" charset="0"/>
+                            </a:rPr>
+                            <m:t>Of</m:t>
+                          </m:r>
+                          <m:r>
+                            <a:rPr lang="en-US" sz="2400" b="0" i="0" smtClean="0">
+                              <a:latin typeface="Cambria Math" panose="02040503050406030204" pitchFamily="18" charset="0"/>
+                            </a:rPr>
+                            <m:t> </m:t>
+                          </m:r>
+                          <m:r>
+                            <m:rPr>
+                              <m:sty m:val="p"/>
+                            </m:rPr>
+                            <a:rPr lang="en-US" sz="2400" b="0" i="0" smtClean="0">
+                              <a:latin typeface="Cambria Math" panose="02040503050406030204" pitchFamily="18" charset="0"/>
+                            </a:rPr>
+                            <m:t>Adults</m:t>
+                          </m:r>
+                          <m:r>
+                            <a:rPr lang="en-US" sz="2400" b="0" i="0" smtClean="0">
+                              <a:latin typeface="Cambria Math" panose="02040503050406030204" pitchFamily="18" charset="0"/>
+                            </a:rPr>
+                            <m:t> </m:t>
+                          </m:r>
+                        </m:num>
+                        <m:den>
+                          <m:r>
+                            <a:rPr lang="en-US" sz="2400" b="0" i="0" smtClean="0">
+                              <a:latin typeface="Cambria Math" panose="02040503050406030204" pitchFamily="18" charset="0"/>
+                            </a:rPr>
+                            <m:t># </m:t>
+                          </m:r>
+                          <m:r>
+                            <m:rPr>
+                              <m:sty m:val="p"/>
+                            </m:rPr>
+                            <a:rPr lang="en-US" sz="2400" b="0" i="0" smtClean="0">
+                              <a:latin typeface="Cambria Math" panose="02040503050406030204" pitchFamily="18" charset="0"/>
+                            </a:rPr>
+                            <m:t>of</m:t>
+                          </m:r>
+                          <m:r>
+                            <a:rPr lang="en-US" sz="2400" b="0" i="0" smtClean="0">
+                              <a:latin typeface="Cambria Math" panose="02040503050406030204" pitchFamily="18" charset="0"/>
+                            </a:rPr>
+                            <m:t> </m:t>
+                          </m:r>
+                          <m:r>
+                            <m:rPr>
+                              <m:sty m:val="p"/>
+                            </m:rPr>
+                            <a:rPr lang="en-US" sz="2400" b="0" i="0" smtClean="0">
+                              <a:latin typeface="Cambria Math" panose="02040503050406030204" pitchFamily="18" charset="0"/>
+                            </a:rPr>
+                            <m:t>Adults</m:t>
+                          </m:r>
+                          <m:r>
+                            <a:rPr lang="en-US" sz="2400" b="0" i="0" smtClean="0">
+                              <a:latin typeface="Cambria Math" panose="02040503050406030204" pitchFamily="18" charset="0"/>
+                            </a:rPr>
+                            <m:t>+# </m:t>
+                          </m:r>
+                          <m:r>
+                            <m:rPr>
+                              <m:sty m:val="p"/>
+                            </m:rPr>
+                            <a:rPr lang="en-US" sz="2400" b="0" i="0" smtClean="0">
+                              <a:latin typeface="Cambria Math" panose="02040503050406030204" pitchFamily="18" charset="0"/>
+                            </a:rPr>
+                            <m:t>of</m:t>
+                          </m:r>
+                          <m:r>
+                            <a:rPr lang="en-US" sz="2400" b="0" i="0" smtClean="0">
+                              <a:latin typeface="Cambria Math" panose="02040503050406030204" pitchFamily="18" charset="0"/>
+                            </a:rPr>
+                            <m:t> </m:t>
+                          </m:r>
+                          <m:r>
+                            <m:rPr>
+                              <m:sty m:val="p"/>
+                            </m:rPr>
+                            <a:rPr lang="en-US" sz="2400" b="0" i="0" smtClean="0">
+                              <a:latin typeface="Cambria Math" panose="02040503050406030204" pitchFamily="18" charset="0"/>
+                            </a:rPr>
+                            <m:t>Larvae</m:t>
+                          </m:r>
+                        </m:den>
+                      </m:f>
+                      <m:r>
+                        <a:rPr lang="en-US" sz="2400" b="0" i="0" smtClean="0">
+                          <a:latin typeface="Cambria Math" panose="02040503050406030204" pitchFamily="18" charset="0"/>
+                        </a:rPr>
+                        <m:t> </m:t>
+                      </m:r>
+                    </m:oMath>
+                  </m:oMathPara>
+                </a14:m>
+                <a:endParaRPr lang="en-US" sz="2400" dirty="0"/>
+              </a:p>
+            </p:txBody>
+          </p:sp>
+        </mc:Choice>
+        <mc:Fallback xmlns="">
+          <p:sp>
+            <p:nvSpPr>
+              <p:cNvPr id="526" name="TextBox 525">
+                <a:extLst>
+                  <a:ext uri="{FF2B5EF4-FFF2-40B4-BE49-F238E27FC236}">
+                    <a16:creationId xmlns:a16="http://schemas.microsoft.com/office/drawing/2014/main" id="{91E7457C-DAA3-D530-53F8-D39B37034CE5}"/>
+                  </a:ext>
+                </a:extLst>
+              </p:cNvPr>
+              <p:cNvSpPr txBox="1">
+                <a:spLocks noRot="1" noChangeAspect="1" noMove="1" noResize="1" noEditPoints="1" noAdjustHandles="1" noChangeArrowheads="1" noChangeShapeType="1" noTextEdit="1"/>
+              </p:cNvSpPr>
+              <p:nvPr/>
+            </p:nvSpPr>
+            <p:spPr>
+              <a:xfrm>
+                <a:off x="628503" y="5362513"/>
+                <a:ext cx="8132033" cy="708335"/>
+              </a:xfrm>
+              <a:prstGeom prst="rect">
+                <a:avLst/>
+              </a:prstGeom>
+              <a:blipFill>
+                <a:blip r:embed="rId2"/>
+                <a:stretch>
+                  <a:fillRect/>
+                </a:stretch>
+              </a:blipFill>
+            </p:spPr>
+            <p:txBody>
+              <a:bodyPr/>
+              <a:lstStyle/>
+              <a:p>
+                <a:r>
+                  <a:rPr lang="en-US">
+                    <a:noFill/>
+                  </a:rPr>
+                  <a:t> </a:t>
+                </a:r>
+              </a:p>
+            </p:txBody>
+          </p:sp>
+        </mc:Fallback>
+      </mc:AlternateContent>
+      <p:sp>
+        <p:nvSpPr>
+          <p:cNvPr id="518" name="Rectangle 517">
+            <a:extLst>
+              <a:ext uri="{FF2B5EF4-FFF2-40B4-BE49-F238E27FC236}">
+                <a16:creationId xmlns:a16="http://schemas.microsoft.com/office/drawing/2014/main" id="{0D5199EE-2D71-9C66-44C8-02691FBB2217}"/>
+              </a:ext>
+            </a:extLst>
+          </p:cNvPr>
+          <p:cNvSpPr/>
+          <p:nvPr/>
+        </p:nvSpPr>
+        <p:spPr>
+          <a:xfrm>
+            <a:off x="1039699" y="2206712"/>
+            <a:ext cx="2184400" cy="2035175"/>
+          </a:xfrm>
+          <a:prstGeom prst="rect">
+            <a:avLst/>
+          </a:prstGeom>
+          <a:solidFill>
+            <a:schemeClr val="tx2">
+              <a:lumMod val="50000"/>
+              <a:lumOff val="50000"/>
+            </a:schemeClr>
+          </a:solidFill>
+        </p:spPr>
+        <p:style>
+          <a:lnRef idx="2">
+            <a:schemeClr val="accent1">
+              <a:shade val="15000"/>
+            </a:schemeClr>
+          </a:lnRef>
+          <a:fillRef idx="1">
+            <a:schemeClr val="accent1"/>
+          </a:fillRef>
+          <a:effectRef idx="0">
+            <a:schemeClr val="accent1"/>
+          </a:effectRef>
+          <a:fontRef idx="minor">
+            <a:schemeClr val="lt1"/>
+          </a:fontRef>
+        </p:style>
+        <p:txBody>
+          <a:bodyPr rtlCol="0" anchor="ctr"/>
+          <a:lstStyle/>
+          <a:p>
+            <a:pPr algn="ctr"/>
+            <a:r>
+              <a:rPr lang="en-US" sz="2400" b="1" dirty="0"/>
+              <a:t>MPA </a:t>
+            </a:r>
+            <a:r>
+              <a:rPr lang="en-US" sz="2400" b="1" i="1" dirty="0"/>
+              <a:t>A</a:t>
+            </a:r>
+          </a:p>
+        </p:txBody>
+      </p:sp>
+      <p:sp>
+        <p:nvSpPr>
+          <p:cNvPr id="519" name="Arrow: Curved Up 518">
+            <a:extLst>
+              <a:ext uri="{FF2B5EF4-FFF2-40B4-BE49-F238E27FC236}">
+                <a16:creationId xmlns:a16="http://schemas.microsoft.com/office/drawing/2014/main" id="{630F9586-8ADD-D566-3A9F-6D0526326C17}"/>
+              </a:ext>
+            </a:extLst>
+          </p:cNvPr>
+          <p:cNvSpPr/>
+          <p:nvPr/>
+        </p:nvSpPr>
+        <p:spPr>
+          <a:xfrm rot="10800000">
+            <a:off x="1404028" y="1602984"/>
+            <a:ext cx="1455740" cy="603728"/>
+          </a:xfrm>
+          <a:prstGeom prst="curvedUpArrow">
+            <a:avLst>
+              <a:gd name="adj1" fmla="val 18326"/>
+              <a:gd name="adj2" fmla="val 50000"/>
+              <a:gd name="adj3" fmla="val 25000"/>
+            </a:avLst>
+          </a:prstGeom>
+          <a:solidFill>
+            <a:schemeClr val="tx1"/>
+          </a:solidFill>
+        </p:spPr>
+        <p:style>
+          <a:lnRef idx="2">
+            <a:schemeClr val="dk1">
+              <a:shade val="15000"/>
+            </a:schemeClr>
+          </a:lnRef>
+          <a:fillRef idx="1">
+            <a:schemeClr val="dk1"/>
+          </a:fillRef>
+          <a:effectRef idx="0">
+            <a:schemeClr val="dk1"/>
+          </a:effectRef>
+          <a:fontRef idx="minor">
+            <a:schemeClr val="lt1"/>
+          </a:fontRef>
+        </p:style>
+        <p:txBody>
+          <a:bodyPr rtlCol="0" anchor="ctr"/>
+          <a:lstStyle/>
+          <a:p>
+            <a:pPr algn="ctr"/>
+            <a:endParaRPr lang="en-US" dirty="0">
+              <a:solidFill>
+                <a:schemeClr val="tx1"/>
+              </a:solidFill>
+            </a:endParaRPr>
+          </a:p>
+        </p:txBody>
+      </p:sp>
+      <p:sp>
+        <p:nvSpPr>
+          <p:cNvPr id="531" name="Rectangle 530">
+            <a:extLst>
+              <a:ext uri="{FF2B5EF4-FFF2-40B4-BE49-F238E27FC236}">
+                <a16:creationId xmlns:a16="http://schemas.microsoft.com/office/drawing/2014/main" id="{F4C24756-6451-6F7A-36BD-BA9AA436A895}"/>
+              </a:ext>
+            </a:extLst>
+          </p:cNvPr>
+          <p:cNvSpPr/>
+          <p:nvPr/>
+        </p:nvSpPr>
+        <p:spPr>
+          <a:xfrm>
+            <a:off x="6405710" y="2194573"/>
+            <a:ext cx="2184400" cy="2035175"/>
+          </a:xfrm>
+          <a:prstGeom prst="rect">
+            <a:avLst/>
+          </a:prstGeom>
+          <a:solidFill>
+            <a:schemeClr val="tx2">
+              <a:lumMod val="50000"/>
+              <a:lumOff val="50000"/>
+            </a:schemeClr>
+          </a:solidFill>
+        </p:spPr>
+        <p:style>
+          <a:lnRef idx="2">
+            <a:schemeClr val="accent1">
+              <a:shade val="15000"/>
+            </a:schemeClr>
+          </a:lnRef>
+          <a:fillRef idx="1">
+            <a:schemeClr val="accent1"/>
+          </a:fillRef>
+          <a:effectRef idx="0">
+            <a:schemeClr val="accent1"/>
+          </a:effectRef>
+          <a:fontRef idx="minor">
+            <a:schemeClr val="lt1"/>
+          </a:fontRef>
+        </p:style>
+        <p:txBody>
+          <a:bodyPr rtlCol="0" anchor="ctr"/>
+          <a:lstStyle/>
+          <a:p>
+            <a:pPr algn="ctr"/>
+            <a:r>
+              <a:rPr lang="en-US" sz="2400" dirty="0"/>
+              <a:t>MPA </a:t>
+            </a:r>
+            <a:r>
+              <a:rPr lang="en-US" sz="2400" i="1" dirty="0"/>
+              <a:t>B</a:t>
+            </a:r>
+          </a:p>
+        </p:txBody>
+      </p:sp>
+      <p:sp>
+        <p:nvSpPr>
+          <p:cNvPr id="532" name="Rectangle 531">
+            <a:extLst>
+              <a:ext uri="{FF2B5EF4-FFF2-40B4-BE49-F238E27FC236}">
+                <a16:creationId xmlns:a16="http://schemas.microsoft.com/office/drawing/2014/main" id="{E9963CB4-E138-C445-9AFF-5CA86C5713E6}"/>
+              </a:ext>
+            </a:extLst>
+          </p:cNvPr>
+          <p:cNvSpPr/>
+          <p:nvPr/>
+        </p:nvSpPr>
+        <p:spPr>
+          <a:xfrm>
+            <a:off x="3730771" y="2206477"/>
+            <a:ext cx="2184400" cy="2035175"/>
+          </a:xfrm>
+          <a:prstGeom prst="rect">
+            <a:avLst/>
+          </a:prstGeom>
+          <a:solidFill>
+            <a:schemeClr val="tx2">
+              <a:lumMod val="50000"/>
+              <a:lumOff val="50000"/>
+            </a:schemeClr>
+          </a:solidFill>
+        </p:spPr>
+        <p:style>
+          <a:lnRef idx="2">
+            <a:schemeClr val="accent1">
+              <a:shade val="15000"/>
+            </a:schemeClr>
+          </a:lnRef>
+          <a:fillRef idx="1">
+            <a:schemeClr val="accent1"/>
+          </a:fillRef>
+          <a:effectRef idx="0">
+            <a:schemeClr val="accent1"/>
+          </a:effectRef>
+          <a:fontRef idx="minor">
+            <a:schemeClr val="lt1"/>
+          </a:fontRef>
+        </p:style>
+        <p:txBody>
+          <a:bodyPr rtlCol="0" anchor="ctr"/>
+          <a:lstStyle/>
+          <a:p>
+            <a:pPr algn="ctr"/>
+            <a:r>
+              <a:rPr lang="en-US" sz="2400" b="1" dirty="0"/>
+              <a:t>MPA </a:t>
+            </a:r>
+            <a:r>
+              <a:rPr lang="en-US" sz="2400" b="1" i="1" dirty="0"/>
+              <a:t>A</a:t>
+            </a:r>
+          </a:p>
+        </p:txBody>
+      </p:sp>
+      <p:sp>
+        <p:nvSpPr>
+          <p:cNvPr id="533" name="Arrow: Curved Up 532">
+            <a:extLst>
+              <a:ext uri="{FF2B5EF4-FFF2-40B4-BE49-F238E27FC236}">
+                <a16:creationId xmlns:a16="http://schemas.microsoft.com/office/drawing/2014/main" id="{3FA1CE35-AC3C-C739-0E2D-9342663209CC}"/>
+              </a:ext>
+            </a:extLst>
+          </p:cNvPr>
+          <p:cNvSpPr/>
+          <p:nvPr/>
+        </p:nvSpPr>
+        <p:spPr>
+          <a:xfrm flipH="1" flipV="1">
+            <a:off x="4561620" y="1671397"/>
+            <a:ext cx="3157535" cy="523175"/>
+          </a:xfrm>
+          <a:prstGeom prst="curvedUpArrow">
+            <a:avLst>
+              <a:gd name="adj1" fmla="val 21133"/>
+              <a:gd name="adj2" fmla="val 50000"/>
+              <a:gd name="adj3" fmla="val 25000"/>
+            </a:avLst>
+          </a:prstGeom>
+          <a:solidFill>
+            <a:schemeClr val="tx1"/>
+          </a:solidFill>
+        </p:spPr>
+        <p:style>
+          <a:lnRef idx="2">
+            <a:schemeClr val="dk1">
+              <a:shade val="15000"/>
+            </a:schemeClr>
+          </a:lnRef>
+          <a:fillRef idx="1">
+            <a:schemeClr val="dk1"/>
+          </a:fillRef>
+          <a:effectRef idx="0">
+            <a:schemeClr val="dk1"/>
+          </a:effectRef>
+          <a:fontRef idx="minor">
+            <a:schemeClr val="lt1"/>
+          </a:fontRef>
+        </p:style>
+        <p:txBody>
+          <a:bodyPr rtlCol="0" anchor="ctr"/>
+          <a:lstStyle/>
+          <a:p>
+            <a:pPr algn="ctr"/>
+            <a:endParaRPr lang="en-US">
+              <a:solidFill>
+                <a:schemeClr val="tx1"/>
+              </a:solidFill>
+            </a:endParaRPr>
+          </a:p>
+        </p:txBody>
+      </p:sp>
+      <p:sp>
+        <p:nvSpPr>
+          <p:cNvPr id="534" name="TextBox 533">
+            <a:extLst>
+              <a:ext uri="{FF2B5EF4-FFF2-40B4-BE49-F238E27FC236}">
+                <a16:creationId xmlns:a16="http://schemas.microsoft.com/office/drawing/2014/main" id="{1DF39742-5893-637C-262D-6D51FF92816F}"/>
+              </a:ext>
+            </a:extLst>
+          </p:cNvPr>
+          <p:cNvSpPr txBox="1"/>
+          <p:nvPr/>
+        </p:nvSpPr>
+        <p:spPr>
+          <a:xfrm>
+            <a:off x="1630204" y="4403329"/>
+            <a:ext cx="6346209" cy="461665"/>
+          </a:xfrm>
+          <a:prstGeom prst="rect">
+            <a:avLst/>
+          </a:prstGeom>
+          <a:noFill/>
+        </p:spPr>
+        <p:txBody>
+          <a:bodyPr wrap="square" rtlCol="0">
+            <a:spAutoFit/>
+          </a:bodyPr>
+          <a:lstStyle/>
+          <a:p>
+            <a:pPr algn="ctr"/>
+            <a:r>
+              <a:rPr lang="en-US" sz="2400" dirty="0"/>
+              <a:t>MPA Origin Settlers = Retention + Import</a:t>
+            </a:r>
+          </a:p>
+        </p:txBody>
+      </p:sp>
+      <p:sp>
+        <p:nvSpPr>
+          <p:cNvPr id="513" name="TextBox 512">
+            <a:extLst>
+              <a:ext uri="{FF2B5EF4-FFF2-40B4-BE49-F238E27FC236}">
+                <a16:creationId xmlns:a16="http://schemas.microsoft.com/office/drawing/2014/main" id="{5788F9ED-9F6D-3094-AC84-D59428B80430}"/>
+              </a:ext>
+            </a:extLst>
+          </p:cNvPr>
+          <p:cNvSpPr txBox="1"/>
+          <p:nvPr/>
+        </p:nvSpPr>
+        <p:spPr>
+          <a:xfrm>
+            <a:off x="10206354" y="695470"/>
+            <a:ext cx="197501" cy="369332"/>
+          </a:xfrm>
+          <a:prstGeom prst="rect">
+            <a:avLst/>
+          </a:prstGeom>
+          <a:noFill/>
+        </p:spPr>
+        <p:txBody>
+          <a:bodyPr wrap="square" rtlCol="0">
+            <a:spAutoFit/>
+          </a:bodyPr>
+          <a:lstStyle/>
+          <a:p>
+            <a:r>
+              <a:rPr lang="en-US"/>
+              <a:t>*</a:t>
+            </a:r>
+            <a:endParaRPr lang="en-US" dirty="0"/>
           </a:p>
         </p:txBody>
       </p:sp>

--- a/figs/fig1.pptx
+++ b/figs/fig1.pptx
@@ -260,7 +260,7 @@
           <a:p>
             <a:fld id="{BFBBBFAB-639F-4F44-8AC5-62BA21F76FBF}" type="datetimeFigureOut">
               <a:rPr lang="en-US" smtClean="0"/>
-              <a:t>8/8/2025</a:t>
+              <a:t>3/6/2026</a:t>
             </a:fld>
             <a:endParaRPr lang="en-US"/>
           </a:p>
@@ -458,7 +458,7 @@
           <a:p>
             <a:fld id="{BFBBBFAB-639F-4F44-8AC5-62BA21F76FBF}" type="datetimeFigureOut">
               <a:rPr lang="en-US" smtClean="0"/>
-              <a:t>8/8/2025</a:t>
+              <a:t>3/6/2026</a:t>
             </a:fld>
             <a:endParaRPr lang="en-US"/>
           </a:p>
@@ -666,7 +666,7 @@
           <a:p>
             <a:fld id="{BFBBBFAB-639F-4F44-8AC5-62BA21F76FBF}" type="datetimeFigureOut">
               <a:rPr lang="en-US" smtClean="0"/>
-              <a:t>8/8/2025</a:t>
+              <a:t>3/6/2026</a:t>
             </a:fld>
             <a:endParaRPr lang="en-US"/>
           </a:p>
@@ -864,7 +864,7 @@
           <a:p>
             <a:fld id="{BFBBBFAB-639F-4F44-8AC5-62BA21F76FBF}" type="datetimeFigureOut">
               <a:rPr lang="en-US" smtClean="0"/>
-              <a:t>8/8/2025</a:t>
+              <a:t>3/6/2026</a:t>
             </a:fld>
             <a:endParaRPr lang="en-US"/>
           </a:p>
@@ -1139,7 +1139,7 @@
           <a:p>
             <a:fld id="{BFBBBFAB-639F-4F44-8AC5-62BA21F76FBF}" type="datetimeFigureOut">
               <a:rPr lang="en-US" smtClean="0"/>
-              <a:t>8/8/2025</a:t>
+              <a:t>3/6/2026</a:t>
             </a:fld>
             <a:endParaRPr lang="en-US"/>
           </a:p>
@@ -1404,7 +1404,7 @@
           <a:p>
             <a:fld id="{BFBBBFAB-639F-4F44-8AC5-62BA21F76FBF}" type="datetimeFigureOut">
               <a:rPr lang="en-US" smtClean="0"/>
-              <a:t>8/8/2025</a:t>
+              <a:t>3/6/2026</a:t>
             </a:fld>
             <a:endParaRPr lang="en-US"/>
           </a:p>
@@ -1816,7 +1816,7 @@
           <a:p>
             <a:fld id="{BFBBBFAB-639F-4F44-8AC5-62BA21F76FBF}" type="datetimeFigureOut">
               <a:rPr lang="en-US" smtClean="0"/>
-              <a:t>8/8/2025</a:t>
+              <a:t>3/6/2026</a:t>
             </a:fld>
             <a:endParaRPr lang="en-US"/>
           </a:p>
@@ -1957,7 +1957,7 @@
           <a:p>
             <a:fld id="{BFBBBFAB-639F-4F44-8AC5-62BA21F76FBF}" type="datetimeFigureOut">
               <a:rPr lang="en-US" smtClean="0"/>
-              <a:t>8/8/2025</a:t>
+              <a:t>3/6/2026</a:t>
             </a:fld>
             <a:endParaRPr lang="en-US"/>
           </a:p>
@@ -2070,7 +2070,7 @@
           <a:p>
             <a:fld id="{BFBBBFAB-639F-4F44-8AC5-62BA21F76FBF}" type="datetimeFigureOut">
               <a:rPr lang="en-US" smtClean="0"/>
-              <a:t>8/8/2025</a:t>
+              <a:t>3/6/2026</a:t>
             </a:fld>
             <a:endParaRPr lang="en-US"/>
           </a:p>
@@ -2381,7 +2381,7 @@
           <a:p>
             <a:fld id="{BFBBBFAB-639F-4F44-8AC5-62BA21F76FBF}" type="datetimeFigureOut">
               <a:rPr lang="en-US" smtClean="0"/>
-              <a:t>8/8/2025</a:t>
+              <a:t>3/6/2026</a:t>
             </a:fld>
             <a:endParaRPr lang="en-US"/>
           </a:p>
@@ -2669,7 +2669,7 @@
           <a:p>
             <a:fld id="{BFBBBFAB-639F-4F44-8AC5-62BA21F76FBF}" type="datetimeFigureOut">
               <a:rPr lang="en-US" smtClean="0"/>
-              <a:t>8/8/2025</a:t>
+              <a:t>3/6/2026</a:t>
             </a:fld>
             <a:endParaRPr lang="en-US"/>
           </a:p>
@@ -2910,7 +2910,7 @@
           <a:p>
             <a:fld id="{BFBBBFAB-639F-4F44-8AC5-62BA21F76FBF}" type="datetimeFigureOut">
               <a:rPr lang="en-US" smtClean="0"/>
-              <a:t>8/8/2025</a:t>
+              <a:t>3/6/2026</a:t>
             </a:fld>
             <a:endParaRPr lang="en-US"/>
           </a:p>
@@ -24430,7 +24430,7 @@
         <p:spPr>
           <a:xfrm>
             <a:off x="7643476" y="1137267"/>
-            <a:ext cx="5125757" cy="461665"/>
+            <a:ext cx="5125757" cy="830997"/>
           </a:xfrm>
           <a:prstGeom prst="rect">
             <a:avLst/>
@@ -24446,7 +24446,14 @@
             <a:pPr algn="ctr"/>
             <a:r>
               <a:rPr lang="en-US" sz="2400" dirty="0"/>
-              <a:t>Export</a:t>
+              <a:t>Export </a:t>
+            </a:r>
+          </a:p>
+          <a:p>
+            <a:pPr algn="ctr"/>
+            <a:r>
+              <a:rPr lang="en-US" sz="2400" dirty="0"/>
+              <a:t>(for MPA analysis)</a:t>
             </a:r>
           </a:p>
         </p:txBody>
@@ -24766,7 +24773,7 @@
             <a:pPr algn="ctr"/>
             <a:r>
               <a:rPr lang="en-US" sz="2400" b="1" dirty="0"/>
-              <a:t>MPA </a:t>
+              <a:t>Patch </a:t>
             </a:r>
             <a:r>
               <a:rPr lang="en-US" sz="2400" b="1" i="1" dirty="0"/>
@@ -24882,7 +24889,7 @@
             <a:pPr algn="ctr"/>
             <a:r>
               <a:rPr lang="en-US" sz="2400" dirty="0"/>
-              <a:t>MPA </a:t>
+              <a:t>Patch </a:t>
             </a:r>
             <a:r>
               <a:rPr lang="en-US" sz="2400" i="1" dirty="0"/>
@@ -24941,7 +24948,7 @@
             <a:pPr algn="ctr"/>
             <a:r>
               <a:rPr lang="en-US" sz="2400" b="1" dirty="0"/>
-              <a:t>MPA </a:t>
+              <a:t>Patch </a:t>
             </a:r>
             <a:r>
               <a:rPr lang="en-US" sz="2400" b="1" i="1" dirty="0"/>
@@ -25037,8 +25044,12 @@
           <a:p>
             <a:pPr algn="ctr"/>
             <a:r>
+              <a:rPr lang="en-US" sz="2400"/>
+              <a:t>Overall Connectivity </a:t>
+            </a:r>
+            <a:r>
               <a:rPr lang="en-US" sz="2400" dirty="0"/>
-              <a:t>MPA Origin Settlers = Retention + Import</a:t>
+              <a:t>= Retention + Import</a:t>
             </a:r>
           </a:p>
         </p:txBody>
